--- a/db-relaties.pptx
+++ b/db-relaties.pptx
@@ -166,6 +166,60 @@
 </inkml:ink>
 </file>
 
+<file path=ppt/ink/ink3.xml><?xml version="1.0" encoding="utf-8"?>
+<inkml:ink xmlns:inkml="http://www.w3.org/2003/InkML">
+  <inkml:definitions>
+    <inkml:context xml:id="ctx0">
+      <inkml:inkSource xml:id="inkSrc0">
+        <inkml:traceFormat>
+          <inkml:channel name="X" type="integer" min="-2.14748E9" max="2.14748E9" units="cm"/>
+          <inkml:channel name="Y" type="integer" min="-2.14748E9" max="2.14748E9" units="cm"/>
+          <inkml:channel name="F" type="integer" max="32767" units="dev"/>
+        </inkml:traceFormat>
+        <inkml:channelProperties>
+          <inkml:channelProperty channel="X" name="resolution" value="1000" units="1/cm"/>
+          <inkml:channelProperty channel="Y" name="resolution" value="1000" units="1/cm"/>
+          <inkml:channelProperty channel="F" name="resolution" value="0" units="1/dev"/>
+        </inkml:channelProperties>
+      </inkml:inkSource>
+      <inkml:timestamp xml:id="ts0" timeString="2026-09-14T09:12:56.630"/>
+    </inkml:context>
+    <inkml:brush xml:id="br0">
+      <inkml:brushProperty name="width" value="0.035" units="cm"/>
+      <inkml:brushProperty name="height" value="0.035" units="cm"/>
+    </inkml:brush>
+  </inkml:definitions>
+  <inkml:trace contextRef="#ctx0" brushRef="#br0">3187 1 24450,'-3187'499'0</inkml:trace>
+</inkml:ink>
+</file>
+
+<file path=ppt/ink/ink4.xml><?xml version="1.0" encoding="utf-8"?>
+<inkml:ink xmlns:inkml="http://www.w3.org/2003/InkML">
+  <inkml:definitions>
+    <inkml:context xml:id="ctx0">
+      <inkml:inkSource xml:id="inkSrc0">
+        <inkml:traceFormat>
+          <inkml:channel name="X" type="integer" min="-2.14748E9" max="2.14748E9" units="cm"/>
+          <inkml:channel name="Y" type="integer" min="-2.14748E9" max="2.14748E9" units="cm"/>
+          <inkml:channel name="F" type="integer" max="32767" units="dev"/>
+        </inkml:traceFormat>
+        <inkml:channelProperties>
+          <inkml:channelProperty channel="X" name="resolution" value="1000" units="1/cm"/>
+          <inkml:channelProperty channel="Y" name="resolution" value="1000" units="1/cm"/>
+          <inkml:channelProperty channel="F" name="resolution" value="0" units="1/dev"/>
+        </inkml:channelProperties>
+      </inkml:inkSource>
+      <inkml:timestamp xml:id="ts0" timeString="2026-09-14T09:12:56.631"/>
+    </inkml:context>
+    <inkml:brush xml:id="br0">
+      <inkml:brushProperty name="width" value="0.035" units="cm"/>
+      <inkml:brushProperty name="height" value="0.035" units="cm"/>
+    </inkml:brush>
+  </inkml:definitions>
+  <inkml:trace contextRef="#ctx0" brushRef="#br0">1 0 24575,'0'552'-1365,"0"-531"-5461</inkml:trace>
+</inkml:ink>
+</file>
+
 <file path=ppt/slideLayouts/slideLayout1.xml><?xml version="1.0" encoding="utf-8"?>
 <p:sldLayout xmlns:a="http://schemas.openxmlformats.org/drawingml/2006/main" xmlns:r="http://schemas.openxmlformats.org/officeDocument/2006/relationships" xmlns:p="http://schemas.openxmlformats.org/presentationml/2006/main" type="title" preserve="1">
   <p:cSld name="Titeldia">
@@ -313,7 +367,7 @@
           <a:p>
             <a:fld id="{DE20EE3A-6FCC-4075-BC0D-494889CB012D}" type="datetimeFigureOut">
               <a:rPr lang="nl-NL" smtClean="0"/>
-              <a:t>8-9-2026</a:t>
+              <a:t>14-9-2026</a:t>
             </a:fld>
             <a:endParaRPr lang="nl-NL"/>
           </a:p>
@@ -511,7 +565,7 @@
           <a:p>
             <a:fld id="{DE20EE3A-6FCC-4075-BC0D-494889CB012D}" type="datetimeFigureOut">
               <a:rPr lang="nl-NL" smtClean="0"/>
-              <a:t>8-9-2026</a:t>
+              <a:t>14-9-2026</a:t>
             </a:fld>
             <a:endParaRPr lang="nl-NL"/>
           </a:p>
@@ -719,7 +773,7 @@
           <a:p>
             <a:fld id="{DE20EE3A-6FCC-4075-BC0D-494889CB012D}" type="datetimeFigureOut">
               <a:rPr lang="nl-NL" smtClean="0"/>
-              <a:t>8-9-2026</a:t>
+              <a:t>14-9-2026</a:t>
             </a:fld>
             <a:endParaRPr lang="nl-NL"/>
           </a:p>
@@ -917,7 +971,7 @@
           <a:p>
             <a:fld id="{DE20EE3A-6FCC-4075-BC0D-494889CB012D}" type="datetimeFigureOut">
               <a:rPr lang="nl-NL" smtClean="0"/>
-              <a:t>8-9-2026</a:t>
+              <a:t>14-9-2026</a:t>
             </a:fld>
             <a:endParaRPr lang="nl-NL"/>
           </a:p>
@@ -1192,7 +1246,7 @@
           <a:p>
             <a:fld id="{DE20EE3A-6FCC-4075-BC0D-494889CB012D}" type="datetimeFigureOut">
               <a:rPr lang="nl-NL" smtClean="0"/>
-              <a:t>8-9-2026</a:t>
+              <a:t>14-9-2026</a:t>
             </a:fld>
             <a:endParaRPr lang="nl-NL"/>
           </a:p>
@@ -1457,7 +1511,7 @@
           <a:p>
             <a:fld id="{DE20EE3A-6FCC-4075-BC0D-494889CB012D}" type="datetimeFigureOut">
               <a:rPr lang="nl-NL" smtClean="0"/>
-              <a:t>8-9-2026</a:t>
+              <a:t>14-9-2026</a:t>
             </a:fld>
             <a:endParaRPr lang="nl-NL"/>
           </a:p>
@@ -1869,7 +1923,7 @@
           <a:p>
             <a:fld id="{DE20EE3A-6FCC-4075-BC0D-494889CB012D}" type="datetimeFigureOut">
               <a:rPr lang="nl-NL" smtClean="0"/>
-              <a:t>8-9-2026</a:t>
+              <a:t>14-9-2026</a:t>
             </a:fld>
             <a:endParaRPr lang="nl-NL"/>
           </a:p>
@@ -2010,7 +2064,7 @@
           <a:p>
             <a:fld id="{DE20EE3A-6FCC-4075-BC0D-494889CB012D}" type="datetimeFigureOut">
               <a:rPr lang="nl-NL" smtClean="0"/>
-              <a:t>8-9-2026</a:t>
+              <a:t>14-9-2026</a:t>
             </a:fld>
             <a:endParaRPr lang="nl-NL"/>
           </a:p>
@@ -2123,7 +2177,7 @@
           <a:p>
             <a:fld id="{DE20EE3A-6FCC-4075-BC0D-494889CB012D}" type="datetimeFigureOut">
               <a:rPr lang="nl-NL" smtClean="0"/>
-              <a:t>8-9-2026</a:t>
+              <a:t>14-9-2026</a:t>
             </a:fld>
             <a:endParaRPr lang="nl-NL"/>
           </a:p>
@@ -2434,7 +2488,7 @@
           <a:p>
             <a:fld id="{DE20EE3A-6FCC-4075-BC0D-494889CB012D}" type="datetimeFigureOut">
               <a:rPr lang="nl-NL" smtClean="0"/>
-              <a:t>8-9-2026</a:t>
+              <a:t>14-9-2026</a:t>
             </a:fld>
             <a:endParaRPr lang="nl-NL"/>
           </a:p>
@@ -2722,7 +2776,7 @@
           <a:p>
             <a:fld id="{DE20EE3A-6FCC-4075-BC0D-494889CB012D}" type="datetimeFigureOut">
               <a:rPr lang="nl-NL" smtClean="0"/>
-              <a:t>8-9-2026</a:t>
+              <a:t>14-9-2026</a:t>
             </a:fld>
             <a:endParaRPr lang="nl-NL"/>
           </a:p>
@@ -2963,7 +3017,7 @@
           <a:p>
             <a:fld id="{DE20EE3A-6FCC-4075-BC0D-494889CB012D}" type="datetimeFigureOut">
               <a:rPr lang="nl-NL" smtClean="0"/>
-              <a:t>8-9-2026</a:t>
+              <a:t>14-9-2026</a:t>
             </a:fld>
             <a:endParaRPr lang="nl-NL"/>
           </a:p>
@@ -3395,9 +3449,9 @@
         <p:grpSpPr>
           <a:xfrm>
             <a:off x="1442052" y="1147312"/>
-            <a:ext cx="2096219" cy="1992702"/>
+            <a:ext cx="2096219" cy="2113473"/>
             <a:chOff x="9011728" y="508958"/>
-            <a:chExt cx="2096219" cy="1992702"/>
+            <a:chExt cx="2096219" cy="2113473"/>
           </a:xfrm>
         </p:grpSpPr>
         <p:sp>
@@ -3415,7 +3469,7 @@
           <p:spPr>
             <a:xfrm>
               <a:off x="9011728" y="862641"/>
-              <a:ext cx="2096219" cy="1639019"/>
+              <a:ext cx="2096219" cy="1759790"/>
             </a:xfrm>
             <a:prstGeom prst="rect">
               <a:avLst/>
@@ -3453,7 +3507,18 @@
                     <a:schemeClr val="tx1"/>
                   </a:solidFill>
                 </a:rPr>
-                <a:t>ID		</a:t>
+                <a:t>ID	PK	</a:t>
+              </a:r>
+            </a:p>
+            <a:p>
+              <a:pPr algn="ctr"/>
+              <a:r>
+                <a:rPr lang="nl-NL" u="sng" dirty="0">
+                  <a:solidFill>
+                    <a:schemeClr val="tx1"/>
+                  </a:solidFill>
+                </a:rPr>
+                <a:t>Voorraad.ID FK	</a:t>
               </a:r>
             </a:p>
             <a:p>
@@ -3625,7 +3690,7 @@
                     <a:schemeClr val="tx1"/>
                   </a:solidFill>
                 </a:rPr>
-                <a:t>ID		</a:t>
+                <a:t>ID	PK	</a:t>
               </a:r>
             </a:p>
             <a:p>
@@ -3819,7 +3884,7 @@
                     <a:schemeClr val="tx1"/>
                   </a:solidFill>
                 </a:rPr>
-                <a:t>ID		</a:t>
+                <a:t>ID	PK	</a:t>
               </a:r>
             </a:p>
             <a:p>
@@ -3830,7 +3895,7 @@
                     <a:schemeClr val="tx1"/>
                   </a:solidFill>
                 </a:rPr>
-                <a:t>Voorraad.ID	</a:t>
+                <a:t>Voorraad.ID FK	</a:t>
               </a:r>
             </a:p>
             <a:p>
@@ -4005,8 +4070,8 @@
           </a:p>
         </p:txBody>
       </p:sp>
-      <mc:AlternateContent xmlns:mc="http://schemas.openxmlformats.org/markup-compatibility/2006">
-        <mc:Choice xmlns:p14="http://schemas.microsoft.com/office/powerpoint/2010/main" Requires="p14">
+      <mc:AlternateContent xmlns:mc="http://schemas.openxmlformats.org/markup-compatibility/2006" xmlns:p14="http://schemas.microsoft.com/office/powerpoint/2010/main">
+        <mc:Choice Requires="p14">
           <p:contentPart p14:bwMode="auto" r:id="rId2">
             <p14:nvContentPartPr>
               <p14:cNvPr id="22" name="Inkt 21">
@@ -4025,7 +4090,7 @@
             </p14:xfrm>
           </p:contentPart>
         </mc:Choice>
-        <mc:Fallback>
+        <mc:Fallback xmlns="">
           <p:pic>
             <p:nvPicPr>
               <p:cNvPr id="22" name="Inkt 21">
@@ -4056,8 +4121,8 @@
           </p:pic>
         </mc:Fallback>
       </mc:AlternateContent>
-      <mc:AlternateContent xmlns:mc="http://schemas.openxmlformats.org/markup-compatibility/2006">
-        <mc:Choice xmlns:p14="http://schemas.microsoft.com/office/powerpoint/2010/main" Requires="p14">
+      <mc:AlternateContent xmlns:mc="http://schemas.openxmlformats.org/markup-compatibility/2006" xmlns:p14="http://schemas.microsoft.com/office/powerpoint/2010/main">
+        <mc:Choice Requires="p14">
           <p:contentPart p14:bwMode="auto" r:id="rId4">
             <p14:nvContentPartPr>
               <p14:cNvPr id="23" name="Inkt 22">
@@ -4076,7 +4141,7 @@
             </p14:xfrm>
           </p:contentPart>
         </mc:Choice>
-        <mc:Fallback>
+        <mc:Fallback xmlns="">
           <p:pic>
             <p:nvPicPr>
               <p:cNvPr id="23" name="Inkt 22">
@@ -4099,6 +4164,154 @@
               <a:xfrm>
                 <a:off x="7274309" y="1658737"/>
                 <a:ext cx="12600" cy="218520"/>
+              </a:xfrm>
+              <a:prstGeom prst="rect">
+                <a:avLst/>
+              </a:prstGeom>
+            </p:spPr>
+          </p:pic>
+        </mc:Fallback>
+      </mc:AlternateContent>
+      <p:sp>
+        <p:nvSpPr>
+          <p:cNvPr id="2" name="Gelijkbenige driehoek 1">
+            <a:extLst>
+              <a:ext uri="{FF2B5EF4-FFF2-40B4-BE49-F238E27FC236}">
+                <a16:creationId xmlns:a16="http://schemas.microsoft.com/office/drawing/2014/main" id="{6065E297-BF41-8880-146A-DCDD0B2AF572}"/>
+              </a:ext>
+            </a:extLst>
+          </p:cNvPr>
+          <p:cNvSpPr/>
+          <p:nvPr/>
+        </p:nvSpPr>
+        <p:spPr>
+          <a:xfrm rot="16200000">
+            <a:off x="4735543" y="1594840"/>
+            <a:ext cx="271010" cy="353684"/>
+          </a:xfrm>
+          <a:prstGeom prst="triangle">
+            <a:avLst/>
+          </a:prstGeom>
+        </p:spPr>
+        <p:style>
+          <a:lnRef idx="2">
+            <a:schemeClr val="accent1">
+              <a:shade val="15000"/>
+            </a:schemeClr>
+          </a:lnRef>
+          <a:fillRef idx="1">
+            <a:schemeClr val="accent1"/>
+          </a:fillRef>
+          <a:effectRef idx="0">
+            <a:schemeClr val="accent1"/>
+          </a:effectRef>
+          <a:fontRef idx="minor">
+            <a:schemeClr val="lt1"/>
+          </a:fontRef>
+        </p:style>
+        <p:txBody>
+          <a:bodyPr rtlCol="0" anchor="ctr"/>
+          <a:lstStyle/>
+          <a:p>
+            <a:pPr algn="ctr"/>
+            <a:endParaRPr lang="nl-NL"/>
+          </a:p>
+        </p:txBody>
+      </p:sp>
+      <mc:AlternateContent xmlns:mc="http://schemas.openxmlformats.org/markup-compatibility/2006">
+        <mc:Choice xmlns:p14="http://schemas.microsoft.com/office/powerpoint/2010/main" Requires="p14">
+          <p:contentPart p14:bwMode="auto" r:id="rId6">
+            <p14:nvContentPartPr>
+              <p14:cNvPr id="3" name="Inkt 2">
+                <a:extLst>
+                  <a:ext uri="{FF2B5EF4-FFF2-40B4-BE49-F238E27FC236}">
+                    <a16:creationId xmlns:a16="http://schemas.microsoft.com/office/drawing/2014/main" id="{948FE4C6-B00F-66C6-027C-9F4DFED8EF78}"/>
+                  </a:ext>
+                </a:extLst>
+              </p14:cNvPr>
+              <p14:cNvContentPartPr/>
+              <p14:nvPr/>
+            </p14:nvContentPartPr>
+            <p14:xfrm flipV="1">
+              <a:off x="3545351" y="1777177"/>
+              <a:ext cx="1147680" cy="179915"/>
+            </p14:xfrm>
+          </p:contentPart>
+        </mc:Choice>
+        <mc:Fallback>
+          <p:pic>
+            <p:nvPicPr>
+              <p:cNvPr id="3" name="Inkt 2">
+                <a:extLst>
+                  <a:ext uri="{FF2B5EF4-FFF2-40B4-BE49-F238E27FC236}">
+                    <a16:creationId xmlns:a16="http://schemas.microsoft.com/office/drawing/2014/main" id="{948FE4C6-B00F-66C6-027C-9F4DFED8EF78}"/>
+                  </a:ext>
+                </a:extLst>
+              </p:cNvPr>
+              <p:cNvPicPr/>
+              <p:nvPr/>
+            </p:nvPicPr>
+            <p:blipFill>
+              <a:blip r:embed="rId7"/>
+              <a:stretch>
+                <a:fillRect/>
+              </a:stretch>
+            </p:blipFill>
+            <p:spPr>
+              <a:xfrm flipV="1">
+                <a:off x="3539231" y="1771060"/>
+                <a:ext cx="1159920" cy="192149"/>
+              </a:xfrm>
+              <a:prstGeom prst="rect">
+                <a:avLst/>
+              </a:prstGeom>
+            </p:spPr>
+          </p:pic>
+        </mc:Fallback>
+      </mc:AlternateContent>
+      <mc:AlternateContent xmlns:mc="http://schemas.openxmlformats.org/markup-compatibility/2006">
+        <mc:Choice xmlns:p14="http://schemas.microsoft.com/office/powerpoint/2010/main" Requires="p14">
+          <p:contentPart p14:bwMode="auto" r:id="rId8">
+            <p14:nvContentPartPr>
+              <p14:cNvPr id="4" name="Inkt 3">
+                <a:extLst>
+                  <a:ext uri="{FF2B5EF4-FFF2-40B4-BE49-F238E27FC236}">
+                    <a16:creationId xmlns:a16="http://schemas.microsoft.com/office/drawing/2014/main" id="{B2E327BC-3580-C5D8-CD11-6B73D608D452}"/>
+                  </a:ext>
+                </a:extLst>
+              </p14:cNvPr>
+              <p14:cNvContentPartPr/>
+              <p14:nvPr/>
+            </p14:nvContentPartPr>
+            <p14:xfrm>
+              <a:off x="3674591" y="1828793"/>
+              <a:ext cx="360" cy="206280"/>
+            </p14:xfrm>
+          </p:contentPart>
+        </mc:Choice>
+        <mc:Fallback>
+          <p:pic>
+            <p:nvPicPr>
+              <p:cNvPr id="4" name="Inkt 3">
+                <a:extLst>
+                  <a:ext uri="{FF2B5EF4-FFF2-40B4-BE49-F238E27FC236}">
+                    <a16:creationId xmlns:a16="http://schemas.microsoft.com/office/drawing/2014/main" id="{B2E327BC-3580-C5D8-CD11-6B73D608D452}"/>
+                  </a:ext>
+                </a:extLst>
+              </p:cNvPr>
+              <p:cNvPicPr/>
+              <p:nvPr/>
+            </p:nvPicPr>
+            <p:blipFill>
+              <a:blip r:embed="rId9"/>
+              <a:stretch>
+                <a:fillRect/>
+              </a:stretch>
+            </p:blipFill>
+            <p:spPr>
+              <a:xfrm>
+                <a:off x="3668471" y="1822684"/>
+                <a:ext cx="12600" cy="218499"/>
               </a:xfrm>
               <a:prstGeom prst="rect">
                 <a:avLst/>
